--- a/ゲーム科1年/00_前期/ゲームプログラミングⅢ/ゲーム数学/座学/05_中点.pptx
+++ b/ゲーム科1年/00_前期/ゲームプログラミングⅢ/ゲーム数学/座学/05_中点.pptx
@@ -262,7 +262,7 @@
           <a:p>
             <a:fld id="{E9CC885B-4903-4D54-9A93-00025F12DED9}" type="datetimeFigureOut">
               <a:rPr kumimoji="1" lang="ja-JP" altLang="en-US" smtClean="0"/>
-              <a:t>2024/10/3</a:t>
+              <a:t>2025/6/19</a:t>
             </a:fld>
             <a:endParaRPr kumimoji="1" lang="ja-JP" altLang="en-US"/>
           </a:p>
@@ -492,7 +492,7 @@
           <a:p>
             <a:fld id="{E9CC885B-4903-4D54-9A93-00025F12DED9}" type="datetimeFigureOut">
               <a:rPr kumimoji="1" lang="ja-JP" altLang="en-US" smtClean="0"/>
-              <a:t>2024/10/3</a:t>
+              <a:t>2025/6/19</a:t>
             </a:fld>
             <a:endParaRPr kumimoji="1" lang="ja-JP" altLang="en-US"/>
           </a:p>
@@ -732,7 +732,7 @@
           <a:p>
             <a:fld id="{E9CC885B-4903-4D54-9A93-00025F12DED9}" type="datetimeFigureOut">
               <a:rPr kumimoji="1" lang="ja-JP" altLang="en-US" smtClean="0"/>
-              <a:t>2024/10/3</a:t>
+              <a:t>2025/6/19</a:t>
             </a:fld>
             <a:endParaRPr kumimoji="1" lang="ja-JP" altLang="en-US"/>
           </a:p>
@@ -962,7 +962,7 @@
           <a:p>
             <a:fld id="{E9CC885B-4903-4D54-9A93-00025F12DED9}" type="datetimeFigureOut">
               <a:rPr kumimoji="1" lang="ja-JP" altLang="en-US" smtClean="0"/>
-              <a:t>2024/10/3</a:t>
+              <a:t>2025/6/19</a:t>
             </a:fld>
             <a:endParaRPr kumimoji="1" lang="ja-JP" altLang="en-US"/>
           </a:p>
@@ -1237,7 +1237,7 @@
           <a:p>
             <a:fld id="{E9CC885B-4903-4D54-9A93-00025F12DED9}" type="datetimeFigureOut">
               <a:rPr kumimoji="1" lang="ja-JP" altLang="en-US" smtClean="0"/>
-              <a:t>2024/10/3</a:t>
+              <a:t>2025/6/19</a:t>
             </a:fld>
             <a:endParaRPr kumimoji="1" lang="ja-JP" altLang="en-US"/>
           </a:p>
@@ -1566,7 +1566,7 @@
           <a:p>
             <a:fld id="{E9CC885B-4903-4D54-9A93-00025F12DED9}" type="datetimeFigureOut">
               <a:rPr kumimoji="1" lang="ja-JP" altLang="en-US" smtClean="0"/>
-              <a:t>2024/10/3</a:t>
+              <a:t>2025/6/19</a:t>
             </a:fld>
             <a:endParaRPr kumimoji="1" lang="ja-JP" altLang="en-US"/>
           </a:p>
@@ -2042,7 +2042,7 @@
           <a:p>
             <a:fld id="{E9CC885B-4903-4D54-9A93-00025F12DED9}" type="datetimeFigureOut">
               <a:rPr kumimoji="1" lang="ja-JP" altLang="en-US" smtClean="0"/>
-              <a:t>2024/10/3</a:t>
+              <a:t>2025/6/19</a:t>
             </a:fld>
             <a:endParaRPr kumimoji="1" lang="ja-JP" altLang="en-US"/>
           </a:p>
@@ -2183,7 +2183,7 @@
           <a:p>
             <a:fld id="{E9CC885B-4903-4D54-9A93-00025F12DED9}" type="datetimeFigureOut">
               <a:rPr kumimoji="1" lang="ja-JP" altLang="en-US" smtClean="0"/>
-              <a:t>2024/10/3</a:t>
+              <a:t>2025/6/19</a:t>
             </a:fld>
             <a:endParaRPr kumimoji="1" lang="ja-JP" altLang="en-US"/>
           </a:p>
@@ -2296,7 +2296,7 @@
           <a:p>
             <a:fld id="{E9CC885B-4903-4D54-9A93-00025F12DED9}" type="datetimeFigureOut">
               <a:rPr kumimoji="1" lang="ja-JP" altLang="en-US" smtClean="0"/>
-              <a:t>2024/10/3</a:t>
+              <a:t>2025/6/19</a:t>
             </a:fld>
             <a:endParaRPr kumimoji="1" lang="ja-JP" altLang="en-US"/>
           </a:p>
@@ -2639,7 +2639,7 @@
           <a:p>
             <a:fld id="{E9CC885B-4903-4D54-9A93-00025F12DED9}" type="datetimeFigureOut">
               <a:rPr kumimoji="1" lang="ja-JP" altLang="en-US" smtClean="0"/>
-              <a:t>2024/10/3</a:t>
+              <a:t>2025/6/19</a:t>
             </a:fld>
             <a:endParaRPr kumimoji="1" lang="ja-JP" altLang="en-US"/>
           </a:p>
@@ -2927,7 +2927,7 @@
           <a:p>
             <a:fld id="{E9CC885B-4903-4D54-9A93-00025F12DED9}" type="datetimeFigureOut">
               <a:rPr kumimoji="1" lang="ja-JP" altLang="en-US" smtClean="0"/>
-              <a:t>2024/10/3</a:t>
+              <a:t>2025/6/19</a:t>
             </a:fld>
             <a:endParaRPr kumimoji="1" lang="ja-JP" altLang="en-US"/>
           </a:p>
@@ -3200,7 +3200,7 @@
           <a:p>
             <a:fld id="{E9CC885B-4903-4D54-9A93-00025F12DED9}" type="datetimeFigureOut">
               <a:rPr kumimoji="1" lang="ja-JP" altLang="en-US" smtClean="0"/>
-              <a:t>2024/10/3</a:t>
+              <a:t>2025/6/19</a:t>
             </a:fld>
             <a:endParaRPr kumimoji="1" lang="ja-JP" altLang="en-US"/>
           </a:p>
@@ -3619,6 +3619,60 @@
       </p:grpSpPr>
       <p:sp>
         <p:nvSpPr>
+          <p:cNvPr id="2" name="四角形: 角を丸くする 1">
+            <a:extLst>
+              <a:ext uri="{FF2B5EF4-FFF2-40B4-BE49-F238E27FC236}">
+                <a16:creationId xmlns:a16="http://schemas.microsoft.com/office/drawing/2014/main" id="{68016927-15A5-4D61-B040-2A91B64209AD}"/>
+              </a:ext>
+            </a:extLst>
+          </p:cNvPr>
+          <p:cNvSpPr/>
+          <p:nvPr/>
+        </p:nvSpPr>
+        <p:spPr>
+          <a:xfrm>
+            <a:off x="346972" y="2153371"/>
+            <a:ext cx="5393428" cy="3773295"/>
+          </a:xfrm>
+          <a:prstGeom prst="roundRect">
+            <a:avLst/>
+          </a:prstGeom>
+          <a:solidFill>
+            <a:schemeClr val="bg1">
+              <a:lumMod val="85000"/>
+            </a:schemeClr>
+          </a:solidFill>
+          <a:ln>
+            <a:noFill/>
+          </a:ln>
+        </p:spPr>
+        <p:style>
+          <a:lnRef idx="2">
+            <a:schemeClr val="accent1">
+              <a:shade val="50000"/>
+            </a:schemeClr>
+          </a:lnRef>
+          <a:fillRef idx="1">
+            <a:schemeClr val="accent1"/>
+          </a:fillRef>
+          <a:effectRef idx="0">
+            <a:schemeClr val="accent1"/>
+          </a:effectRef>
+          <a:fontRef idx="minor">
+            <a:schemeClr val="lt1"/>
+          </a:fontRef>
+        </p:style>
+        <p:txBody>
+          <a:bodyPr rtlCol="0" anchor="ctr"/>
+          <a:lstStyle/>
+          <a:p>
+            <a:pPr algn="ctr"/>
+            <a:endParaRPr kumimoji="1" lang="ja-JP" altLang="en-US"/>
+          </a:p>
+        </p:txBody>
+      </p:sp>
+      <p:sp>
+        <p:nvSpPr>
           <p:cNvPr id="4" name="テキスト ボックス 3">
             <a:extLst>
               <a:ext uri="{FF2B5EF4-FFF2-40B4-BE49-F238E27FC236}">
@@ -3653,8 +3707,8 @@
           </a:p>
         </p:txBody>
       </p:sp>
-      <mc:AlternateContent xmlns:mc="http://schemas.openxmlformats.org/markup-compatibility/2006">
-        <mc:Choice xmlns:a14="http://schemas.microsoft.com/office/drawing/2010/main" Requires="a14">
+      <mc:AlternateContent xmlns:mc="http://schemas.openxmlformats.org/markup-compatibility/2006" xmlns:a14="http://schemas.microsoft.com/office/drawing/2010/main">
+        <mc:Choice Requires="a14">
           <p:sp>
             <p:nvSpPr>
               <p:cNvPr id="6" name="テキスト ボックス 5">
@@ -4199,7 +4253,7 @@
             </p:txBody>
           </p:sp>
         </mc:Choice>
-        <mc:Fallback>
+        <mc:Fallback xmlns="">
           <p:sp>
             <p:nvSpPr>
               <p:cNvPr id="6" name="テキスト ボックス 5">
@@ -4334,8 +4388,8 @@
           </a:p>
         </p:txBody>
       </p:sp>
-      <mc:AlternateContent xmlns:mc="http://schemas.openxmlformats.org/markup-compatibility/2006">
-        <mc:Choice xmlns:a14="http://schemas.microsoft.com/office/drawing/2010/main" Requires="a14">
+      <mc:AlternateContent xmlns:mc="http://schemas.openxmlformats.org/markup-compatibility/2006" xmlns:a14="http://schemas.microsoft.com/office/drawing/2010/main">
+        <mc:Choice Requires="a14">
           <p:sp>
             <p:nvSpPr>
               <p:cNvPr id="13" name="テキスト ボックス 12">
@@ -4412,7 +4466,7 @@
             </p:txBody>
           </p:sp>
         </mc:Choice>
-        <mc:Fallback>
+        <mc:Fallback xmlns="">
           <p:sp>
             <p:nvSpPr>
               <p:cNvPr id="13" name="テキスト ボックス 12">
@@ -4511,8 +4565,8 @@
           </a:p>
         </p:txBody>
       </p:sp>
-      <mc:AlternateContent xmlns:mc="http://schemas.openxmlformats.org/markup-compatibility/2006">
-        <mc:Choice xmlns:a14="http://schemas.microsoft.com/office/drawing/2010/main" Requires="a14">
+      <mc:AlternateContent xmlns:mc="http://schemas.openxmlformats.org/markup-compatibility/2006" xmlns:a14="http://schemas.microsoft.com/office/drawing/2010/main">
+        <mc:Choice Requires="a14">
           <p:sp>
             <p:nvSpPr>
               <p:cNvPr id="15" name="テキスト ボックス 14">
@@ -4589,7 +4643,7 @@
             </p:txBody>
           </p:sp>
         </mc:Choice>
-        <mc:Fallback>
+        <mc:Fallback xmlns="">
           <p:sp>
             <p:nvSpPr>
               <p:cNvPr id="15" name="テキスト ボックス 14">
@@ -4688,8 +4742,8 @@
           </a:p>
         </p:txBody>
       </p:sp>
-      <mc:AlternateContent xmlns:mc="http://schemas.openxmlformats.org/markup-compatibility/2006">
-        <mc:Choice xmlns:a14="http://schemas.microsoft.com/office/drawing/2010/main" Requires="a14">
+      <mc:AlternateContent xmlns:mc="http://schemas.openxmlformats.org/markup-compatibility/2006" xmlns:a14="http://schemas.microsoft.com/office/drawing/2010/main">
+        <mc:Choice Requires="a14">
           <p:sp>
             <p:nvSpPr>
               <p:cNvPr id="18" name="テキスト ボックス 17">
@@ -4750,7 +4804,7 @@
             </p:txBody>
           </p:sp>
         </mc:Choice>
-        <mc:Fallback>
+        <mc:Fallback xmlns="">
           <p:sp>
             <p:nvSpPr>
               <p:cNvPr id="18" name="テキスト ボックス 17">
@@ -4827,6 +4881,60 @@
       </p:grpSpPr>
       <p:sp>
         <p:nvSpPr>
+          <p:cNvPr id="5" name="四角形: 角を丸くする 4">
+            <a:extLst>
+              <a:ext uri="{FF2B5EF4-FFF2-40B4-BE49-F238E27FC236}">
+                <a16:creationId xmlns:a16="http://schemas.microsoft.com/office/drawing/2014/main" id="{5C5EEEA2-0B8F-4AE0-B788-92F4FB8ED952}"/>
+              </a:ext>
+            </a:extLst>
+          </p:cNvPr>
+          <p:cNvSpPr/>
+          <p:nvPr/>
+        </p:nvSpPr>
+        <p:spPr>
+          <a:xfrm>
+            <a:off x="330037" y="1789305"/>
+            <a:ext cx="6087695" cy="2323862"/>
+          </a:xfrm>
+          <a:prstGeom prst="roundRect">
+            <a:avLst/>
+          </a:prstGeom>
+          <a:solidFill>
+            <a:schemeClr val="bg1">
+              <a:lumMod val="85000"/>
+            </a:schemeClr>
+          </a:solidFill>
+          <a:ln>
+            <a:noFill/>
+          </a:ln>
+        </p:spPr>
+        <p:style>
+          <a:lnRef idx="2">
+            <a:schemeClr val="accent1">
+              <a:shade val="50000"/>
+            </a:schemeClr>
+          </a:lnRef>
+          <a:fillRef idx="1">
+            <a:schemeClr val="accent1"/>
+          </a:fillRef>
+          <a:effectRef idx="0">
+            <a:schemeClr val="accent1"/>
+          </a:effectRef>
+          <a:fontRef idx="minor">
+            <a:schemeClr val="lt1"/>
+          </a:fontRef>
+        </p:style>
+        <p:txBody>
+          <a:bodyPr rtlCol="0" anchor="ctr"/>
+          <a:lstStyle/>
+          <a:p>
+            <a:pPr algn="ctr"/>
+            <a:endParaRPr kumimoji="1" lang="ja-JP" altLang="en-US"/>
+          </a:p>
+        </p:txBody>
+      </p:sp>
+      <p:sp>
+        <p:nvSpPr>
           <p:cNvPr id="4" name="テキスト ボックス 3">
             <a:extLst>
               <a:ext uri="{FF2B5EF4-FFF2-40B4-BE49-F238E27FC236}">
@@ -4861,8 +4969,8 @@
           </a:p>
         </p:txBody>
       </p:sp>
-      <mc:AlternateContent xmlns:mc="http://schemas.openxmlformats.org/markup-compatibility/2006">
-        <mc:Choice xmlns:a14="http://schemas.microsoft.com/office/drawing/2010/main" Requires="a14">
+      <mc:AlternateContent xmlns:mc="http://schemas.openxmlformats.org/markup-compatibility/2006" xmlns:a14="http://schemas.microsoft.com/office/drawing/2010/main">
+        <mc:Choice Requires="a14">
           <p:sp>
             <p:nvSpPr>
               <p:cNvPr id="6" name="テキスト ボックス 5">
@@ -5564,7 +5672,7 @@
             </p:txBody>
           </p:sp>
         </mc:Choice>
-        <mc:Fallback>
+        <mc:Fallback xmlns="">
           <p:sp>
             <p:nvSpPr>
               <p:cNvPr id="6" name="テキスト ボックス 5">
@@ -5641,6 +5749,60 @@
       </p:grpSpPr>
       <p:sp>
         <p:nvSpPr>
+          <p:cNvPr id="12" name="四角形: 角を丸くする 11">
+            <a:extLst>
+              <a:ext uri="{FF2B5EF4-FFF2-40B4-BE49-F238E27FC236}">
+                <a16:creationId xmlns:a16="http://schemas.microsoft.com/office/drawing/2014/main" id="{83C11D7F-268E-42D9-9D56-8F82BE4FBE8B}"/>
+              </a:ext>
+            </a:extLst>
+          </p:cNvPr>
+          <p:cNvSpPr/>
+          <p:nvPr/>
+        </p:nvSpPr>
+        <p:spPr>
+          <a:xfrm>
+            <a:off x="312165" y="1800256"/>
+            <a:ext cx="6858163" cy="4933228"/>
+          </a:xfrm>
+          <a:prstGeom prst="roundRect">
+            <a:avLst/>
+          </a:prstGeom>
+          <a:solidFill>
+            <a:schemeClr val="bg1">
+              <a:lumMod val="85000"/>
+            </a:schemeClr>
+          </a:solidFill>
+          <a:ln>
+            <a:noFill/>
+          </a:ln>
+        </p:spPr>
+        <p:style>
+          <a:lnRef idx="2">
+            <a:schemeClr val="accent1">
+              <a:shade val="50000"/>
+            </a:schemeClr>
+          </a:lnRef>
+          <a:fillRef idx="1">
+            <a:schemeClr val="accent1"/>
+          </a:fillRef>
+          <a:effectRef idx="0">
+            <a:schemeClr val="accent1"/>
+          </a:effectRef>
+          <a:fontRef idx="minor">
+            <a:schemeClr val="lt1"/>
+          </a:fontRef>
+        </p:style>
+        <p:txBody>
+          <a:bodyPr rtlCol="0" anchor="ctr"/>
+          <a:lstStyle/>
+          <a:p>
+            <a:pPr algn="ctr"/>
+            <a:endParaRPr kumimoji="1" lang="ja-JP" altLang="en-US"/>
+          </a:p>
+        </p:txBody>
+      </p:sp>
+      <p:sp>
+        <p:nvSpPr>
           <p:cNvPr id="4" name="テキスト ボックス 3">
             <a:extLst>
               <a:ext uri="{FF2B5EF4-FFF2-40B4-BE49-F238E27FC236}">
@@ -5675,8 +5837,8 @@
           </a:p>
         </p:txBody>
       </p:sp>
-      <mc:AlternateContent xmlns:mc="http://schemas.openxmlformats.org/markup-compatibility/2006">
-        <mc:Choice xmlns:a14="http://schemas.microsoft.com/office/drawing/2010/main" Requires="a14">
+      <mc:AlternateContent xmlns:mc="http://schemas.openxmlformats.org/markup-compatibility/2006" xmlns:a14="http://schemas.microsoft.com/office/drawing/2010/main">
+        <mc:Choice Requires="a14">
           <p:sp>
             <p:nvSpPr>
               <p:cNvPr id="6" name="テキスト ボックス 5">
@@ -6658,7 +6820,7 @@
             </p:txBody>
           </p:sp>
         </mc:Choice>
-        <mc:Fallback>
+        <mc:Fallback xmlns="">
           <p:sp>
             <p:nvSpPr>
               <p:cNvPr id="6" name="テキスト ボックス 5">
@@ -7088,8 +7250,8 @@
           </a:p>
         </p:txBody>
       </p:sp>
-      <mc:AlternateContent xmlns:mc="http://schemas.openxmlformats.org/markup-compatibility/2006">
-        <mc:Choice xmlns:a14="http://schemas.microsoft.com/office/drawing/2010/main" Requires="a14">
+      <mc:AlternateContent xmlns:mc="http://schemas.openxmlformats.org/markup-compatibility/2006" xmlns:a14="http://schemas.microsoft.com/office/drawing/2010/main">
+        <mc:Choice Requires="a14">
           <p:sp>
             <p:nvSpPr>
               <p:cNvPr id="6" name="テキスト ボックス 5">
@@ -7348,7 +7510,7 @@
             </p:txBody>
           </p:sp>
         </mc:Choice>
-        <mc:Fallback>
+        <mc:Fallback xmlns="">
           <p:sp>
             <p:nvSpPr>
               <p:cNvPr id="6" name="テキスト ボックス 5">
